--- a/public/brand/office/niall-tech-presentation-template.pptx
+++ b/public/brand/office/niall-tech-presentation-template.pptx
@@ -1981,7 +1981,7 @@
                 <a:ea typeface="Inter" pitchFamily="34" charset="-122"/>
                 <a:cs typeface="Inter" pitchFamily="34" charset="-120"/>
               </a:rPr>
-              <a:t>+1 (555) 014-2200</a:t>
+              <a:t>(360) 474-7305</a:t>
             </a:r>
             <a:pPr indent="0" marL="0">
               <a:buNone/>

--- a/public/brand/office/niall-tech-presentation-template.pptx
+++ b/public/brand/office/niall-tech-presentation-template.pptx
@@ -2009,7 +2009,7 @@
                 <a:ea typeface="Inter" pitchFamily="34" charset="-122"/>
                 <a:cs typeface="Inter" pitchFamily="34" charset="-120"/>
               </a:rPr>
-              <a:t>paul@nialltech.com</a:t>
+              <a:t>pdent@nialltech.com</a:t>
             </a:r>
             <a:pPr indent="0" marL="0">
               <a:buNone/>

--- a/public/brand/office/niall-tech-presentation-template.pptx
+++ b/public/brand/office/niall-tech-presentation-template.pptx
@@ -2009,7 +2009,7 @@
                 <a:ea typeface="Inter" pitchFamily="34" charset="-122"/>
                 <a:cs typeface="Inter" pitchFamily="34" charset="-120"/>
               </a:rPr>
-              <a:t>pdent@nialltech.com</a:t>
+              <a:t>hello@nialltech.com</a:t>
             </a:r>
             <a:pPr indent="0" marL="0">
               <a:buNone/>
